--- a/docs/Slide15_mechanical_response.pptx
+++ b/docs/Slide15_mechanical_response.pptx
@@ -1539,7 +1539,7 @@
                 <a:ea typeface="Arial"/>
                 <a:cs typeface="Arial"/>
               </a:rPr>
-              <a:t>Across the pool, </a:t>
+              <a:t>To obtain </a:t>
             </a:r>
             <a:r>
               <a:rPr sz="1275" b="1">
@@ -1550,7 +1550,7 @@
                 <a:ea typeface="Arial"/>
                 <a:cs typeface="Arial"/>
               </a:rPr>
-              <a:t>the same machine-learned potential</a:t>
+              <a:t>B₀ and the equilibrium volume</a:t>
             </a:r>
             <a:r>
               <a:rPr sz="1275" b="0">
@@ -1561,7 +1561,7 @@
                 <a:ea typeface="Arial"/>
                 <a:cs typeface="Arial"/>
               </a:rPr>
-              <a:t> supplied every elastic modulus.</a:t>
+              <a:t>, an equation of state was fitted.</a:t>
             </a:r>
           </a:p>
         </p:txBody>
@@ -1677,18 +1677,18 @@
                 <a:ea typeface="Arial"/>
                 <a:cs typeface="Arial"/>
               </a:rPr>
-              <a:t>The curves below are </a:t>
+              <a:t>Adding Cl softens the lattice, </a:t>
             </a:r>
             <a:r>
               <a:rPr sz="1275" b="1">
                 <a:solidFill>
-                  <a:srgbClr val="BE123C"/>
+                  <a:srgbClr val="2563EB"/>
                 </a:solidFill>
                 <a:latin typeface="Arial"/>
                 <a:ea typeface="Arial"/>
                 <a:cs typeface="Arial"/>
               </a:rPr>
-              <a:t>DFT on two compositions, not a check of the whole pool</a:t>
+              <a:t>26.2 to 21.7 GPa</a:t>
             </a:r>
             <a:r>
               <a:rPr sz="1275" b="0">
@@ -1699,7 +1699,7 @@
                 <a:ea typeface="Arial"/>
                 <a:cs typeface="Arial"/>
               </a:rPr>
-              <a:t>.</a:t>
+              <a:t>, although the cell is denser.</a:t>
             </a:r>
           </a:p>
         </p:txBody>
@@ -1908,7 +1908,7 @@
                 </a:solidFill>
                 <a:latin typeface="Arial"/>
               </a:rPr>
-              <a:t>&lt; equation of state by DFT, undoped Li₆PS₅Cl versus Cl-rich LPSCl1.6 &gt;</a:t>
+              <a:t>&lt; equation of state, undoped Li₆PS₅Cl versus Cl-rich LPSCl1.6 &gt;</a:t>
             </a:r>
           </a:p>
         </p:txBody>
@@ -1937,40 +1937,13 @@
           <a:p>
             <a:pPr algn="ctr"/>
             <a:r>
-              <a:rPr sz="1150" b="0">
-                <a:solidFill>
-                  <a:srgbClr val="4B5563"/>
+              <a:rPr sz="1150" b="1">
+                <a:solidFill>
+                  <a:srgbClr val="BE123C"/>
                 </a:solidFill>
                 <a:latin typeface="Arial"/>
               </a:rPr>
-              <a:t>adding Cl softens the lattice, </a:t>
-            </a:r>
-            <a:r>
-              <a:rPr sz="1150" b="1">
-                <a:solidFill>
-                  <a:srgbClr val="2563EB"/>
-                </a:solidFill>
-                <a:latin typeface="Arial"/>
-              </a:rPr>
-              <a:t>26.2 to 21.7 GPa</a:t>
-            </a:r>
-            <a:r>
-              <a:rPr sz="1150" b="0">
-                <a:solidFill>
-                  <a:srgbClr val="4B5563"/>
-                </a:solidFill>
-                <a:latin typeface="Arial"/>
-              </a:rPr>
-              <a:t>; </a:t>
-            </a:r>
-            <a:r>
-              <a:rPr sz="1150" b="1">
-                <a:solidFill>
-                  <a:srgbClr val="BE123C"/>
-                </a:solidFill>
-                <a:latin typeface="Arial"/>
-              </a:rPr>
-              <a:t>the pool-wide moduli are potential values, not DFT</a:t>
+              <a:t>these two curves are DFT; the screening ran on the machine-learned potential with FIRE relaxation</a:t>
             </a:r>
           </a:p>
         </p:txBody>

--- a/docs/Slide15_mechanical_response.pptx
+++ b/docs/Slide15_mechanical_response.pptx
@@ -1568,10 +1568,10 @@
       </p:sp>
       <p:sp>
         <p:nvSpPr>
-          <p:cNvPr id="9" name="bullet-dot-12-1">
+          <p:cNvPr id="11" name="citation-12">
             <a:extLst xmlns:a="http://schemas.openxmlformats.org/drawingml/2006/main">
               <a:ext uri="{FF2B5EF4-FFF2-40B4-BE49-F238E27FC236}">
-                <a16:creationId xmlns:a16="http://schemas.microsoft.com/office/drawing/2014/main" id="{24482457-D12D-4DAD-A142-8484D4982BB7}"/>
+                <a16:creationId xmlns:a16="http://schemas.microsoft.com/office/drawing/2014/main" id="{A8BC88BF-7D00-4A26-8FB0-830F6E1D0CD0}"/>
               </a:ext>
             </a:extLst>
           </p:cNvPr>
@@ -1582,8 +1582,8 @@
         </p:nvSpPr>
         <p:spPr>
           <a:xfrm xmlns:a="http://schemas.openxmlformats.org/drawingml/2006/main">
-            <a:off x="942975" y="1733550"/>
-            <a:ext cx="171450" cy="238125"/>
+            <a:off x="5285232" y="1280160"/>
+            <a:ext cx="3383280" cy="161925"/>
           </a:xfrm>
           <a:prstGeom xmlns:a="http://schemas.openxmlformats.org/drawingml/2006/main" prst="rect">
             <a:avLst/>
@@ -1600,10 +1600,10 @@
           </a:bodyPr>
           <a:lstStyle xmlns:a="http://schemas.openxmlformats.org/drawingml/2006/main"/>
           <a:p xmlns:a="http://schemas.openxmlformats.org/drawingml/2006/main">
-            <a:pPr>
-              <a:defRPr sz="1500">
+            <a:pPr algn="r">
+              <a:defRPr sz="638" i="1">
                 <a:solidFill>
-                  <a:srgbClr val="1F2937"/>
+                  <a:srgbClr val="6B7280"/>
                 </a:solidFill>
                 <a:latin typeface="Arial"/>
                 <a:ea typeface="Arial"/>
@@ -1611,95 +1611,15 @@
               </a:defRPr>
             </a:pPr>
             <a:r>
-              <a:rPr sz="1500">
+              <a:rPr sz="638" i="1">
                 <a:solidFill>
-                  <a:srgbClr val="1F2937"/>
+                  <a:srgbClr val="6B7280"/>
                 </a:solidFill>
                 <a:latin typeface="Arial"/>
                 <a:ea typeface="Arial"/>
                 <a:cs typeface="Arial"/>
               </a:rPr>
-              <a:t>•</a:t>
-            </a:r>
-          </a:p>
-        </p:txBody>
-      </p:sp>
-      <p:sp>
-        <p:nvSpPr>
-          <p:cNvPr id="10" name="bullet-12-1">
-            <a:extLst xmlns:a="http://schemas.openxmlformats.org/drawingml/2006/main">
-              <a:ext uri="{FF2B5EF4-FFF2-40B4-BE49-F238E27FC236}">
-                <a16:creationId xmlns:a16="http://schemas.microsoft.com/office/drawing/2014/main" id="{8C2F66E6-F1E8-4CBA-A7A2-31D4F4A65D9A}"/>
-              </a:ext>
-            </a:extLst>
-          </p:cNvPr>
-          <p:cNvSpPr>
-            <a:spLocks xmlns:a="http://schemas.openxmlformats.org/drawingml/2006/main" noGrp="1"/>
-          </p:cNvSpPr>
-          <p:nvPr/>
-        </p:nvSpPr>
-        <p:spPr>
-          <a:xfrm xmlns:a="http://schemas.openxmlformats.org/drawingml/2006/main">
-            <a:off x="1219200" y="1743075"/>
-            <a:ext cx="7239000" cy="285750"/>
-          </a:xfrm>
-          <a:prstGeom xmlns:a="http://schemas.openxmlformats.org/drawingml/2006/main" prst="rect">
-            <a:avLst/>
-          </a:prstGeom>
-          <a:noFill xmlns:a="http://schemas.openxmlformats.org/drawingml/2006/main"/>
-          <a:ln xmlns:a="http://schemas.openxmlformats.org/drawingml/2006/main" w="0">
-            <a:noFill/>
-            <a:prstDash val="solid"/>
-          </a:ln>
-        </p:spPr>
-        <p:txBody>
-          <a:bodyPr xmlns:a="http://schemas.openxmlformats.org/drawingml/2006/main" lIns="0" tIns="0" rIns="0" bIns="0" anchor="t">
-            <a:normAutofit fontScale="100000"/>
-          </a:bodyPr>
-          <a:lstStyle xmlns:a="http://schemas.openxmlformats.org/drawingml/2006/main"/>
-          <a:p xmlns:a="http://schemas.openxmlformats.org/drawingml/2006/main">
-            <a:pPr>
-              <a:defRPr sz="1275">
-                <a:solidFill>
-                  <a:srgbClr val="1F2937"/>
-                </a:solidFill>
-                <a:latin typeface="Arial"/>
-                <a:ea typeface="Arial"/>
-                <a:cs typeface="Arial"/>
-              </a:defRPr>
-            </a:pPr>
-            <a:r>
-              <a:rPr sz="1275">
-                <a:solidFill>
-                  <a:srgbClr val="1F2937"/>
-                </a:solidFill>
-                <a:latin typeface="Arial"/>
-                <a:ea typeface="Arial"/>
-                <a:cs typeface="Arial"/>
-              </a:rPr>
-              <a:t>Adding Cl softens the lattice, </a:t>
-            </a:r>
-            <a:r>
-              <a:rPr sz="1275" b="1">
-                <a:solidFill>
-                  <a:srgbClr val="2563EB"/>
-                </a:solidFill>
-                <a:latin typeface="Arial"/>
-                <a:ea typeface="Arial"/>
-                <a:cs typeface="Arial"/>
-              </a:rPr>
-              <a:t>26.2 to 21.7 GPa</a:t>
-            </a:r>
-            <a:r>
-              <a:rPr sz="1275" b="0">
-                <a:solidFill>
-                  <a:srgbClr val="374151"/>
-                </a:solidFill>
-                <a:latin typeface="Arial"/>
-                <a:ea typeface="Arial"/>
-                <a:cs typeface="Arial"/>
-              </a:rPr>
-              <a:t>, although the cell is denser.</a:t>
+              <a:t>Our calculation  ·  checked against DFT</a:t>
             </a:r>
           </a:p>
         </p:txBody>
@@ -1758,64 +1678,6 @@
                 <a:cs typeface="Arial"/>
               </a:rPr>
               <a:t>HANYANG UNIVERSITY</a:t>
-            </a:r>
-          </a:p>
-        </p:txBody>
-      </p:sp>
-      <p:sp>
-        <p:nvSpPr>
-          <p:cNvPr id="13" name="footer-lab-12">
-            <a:extLst xmlns:a="http://schemas.openxmlformats.org/drawingml/2006/main">
-              <a:ext uri="{FF2B5EF4-FFF2-40B4-BE49-F238E27FC236}">
-                <a16:creationId xmlns:a16="http://schemas.microsoft.com/office/drawing/2014/main" id="{61955381-FBB0-4423-B157-5C11BFBF3CF2}"/>
-              </a:ext>
-            </a:extLst>
-          </p:cNvPr>
-          <p:cNvSpPr>
-            <a:spLocks xmlns:a="http://schemas.openxmlformats.org/drawingml/2006/main" noGrp="1"/>
-          </p:cNvSpPr>
-          <p:nvPr/>
-        </p:nvSpPr>
-        <p:spPr>
-          <a:xfrm xmlns:a="http://schemas.openxmlformats.org/drawingml/2006/main">
-            <a:off x="3619500" y="6505575"/>
-            <a:ext cx="1905000" cy="171450"/>
-          </a:xfrm>
-          <a:prstGeom xmlns:a="http://schemas.openxmlformats.org/drawingml/2006/main" prst="rect">
-            <a:avLst/>
-          </a:prstGeom>
-          <a:noFill xmlns:a="http://schemas.openxmlformats.org/drawingml/2006/main"/>
-          <a:ln xmlns:a="http://schemas.openxmlformats.org/drawingml/2006/main" w="0">
-            <a:noFill/>
-            <a:prstDash val="solid"/>
-          </a:ln>
-        </p:spPr>
-        <p:txBody>
-          <a:bodyPr xmlns:a="http://schemas.openxmlformats.org/drawingml/2006/main" lIns="0" tIns="0" rIns="0" bIns="0" anchor="t">
-            <a:normAutofit fontScale="100000"/>
-          </a:bodyPr>
-          <a:lstStyle xmlns:a="http://schemas.openxmlformats.org/drawingml/2006/main"/>
-          <a:p xmlns:a="http://schemas.openxmlformats.org/drawingml/2006/main">
-            <a:pPr algn="ctr">
-              <a:defRPr sz="750">
-                <a:solidFill>
-                  <a:srgbClr val="6B7280"/>
-                </a:solidFill>
-                <a:latin typeface="Arial"/>
-                <a:ea typeface="Arial"/>
-                <a:cs typeface="Arial"/>
-              </a:defRPr>
-            </a:pPr>
-            <a:r>
-              <a:rPr sz="750">
-                <a:solidFill>
-                  <a:srgbClr val="6B7280"/>
-                </a:solidFill>
-                <a:latin typeface="Arial"/>
-                <a:ea typeface="Arial"/>
-                <a:cs typeface="Arial"/>
-              </a:rPr>
-              <a:t>Battery Materials Lab.</a:t>
             </a:r>
           </a:p>
         </p:txBody>
@@ -1908,7 +1770,7 @@
                 </a:solidFill>
                 <a:latin typeface="Arial"/>
               </a:rPr>
-              <a:t>&lt; equation of state, undoped Li₆PS₅Cl versus Cl-rich LPSCl1.6 &gt;</a:t>
+              <a:t>&lt; equation of state, undoped Li₆PS₅Cl vs Cl-rich LPSCl1.6 &gt;</a:t>
             </a:r>
           </a:p>
         </p:txBody>
